--- a/courses/ooad/sessions/s09.pptx
+++ b/courses/ooad/sessions/s09.pptx
@@ -426,7 +426,7 @@
   </p:cSld>
   <p:clrMap bg1="lt1" tx1="dk1" bg2="lt2" tx2="dk2" accent1="accent1" accent2="accent2" accent3="accent3" accent4="accent4" accent5="accent5" accent6="accent6" hlink="hlink" folHlink="folHlink"/>
   <p:notesStyle>
-    <a:lvl1pPr marL="0" algn="l" defTabSz="914400" rtl="0" eaLnBrk="1" latinLnBrk="1" hangingPunct="1">
+    <a:lvl1pPr marL="0" algn="l" defTabSz="914400" rtl="0" eaLnBrk="1" latinLnBrk="0" hangingPunct="1">
       <a:defRPr sz="1200" kern="1200">
         <a:solidFill>
           <a:schemeClr val="tx1"/>
@@ -436,7 +436,7 @@
         <a:cs typeface="+mn-cs"/>
       </a:defRPr>
     </a:lvl1pPr>
-    <a:lvl2pPr marL="457200" algn="l" defTabSz="914400" rtl="0" eaLnBrk="1" latinLnBrk="1" hangingPunct="1">
+    <a:lvl2pPr marL="457200" algn="l" defTabSz="914400" rtl="0" eaLnBrk="1" latinLnBrk="0" hangingPunct="1">
       <a:defRPr sz="1200" kern="1200">
         <a:solidFill>
           <a:schemeClr val="tx1"/>
@@ -446,7 +446,7 @@
         <a:cs typeface="+mn-cs"/>
       </a:defRPr>
     </a:lvl2pPr>
-    <a:lvl3pPr marL="914400" algn="l" defTabSz="914400" rtl="0" eaLnBrk="1" latinLnBrk="1" hangingPunct="1">
+    <a:lvl3pPr marL="914400" algn="l" defTabSz="914400" rtl="0" eaLnBrk="1" latinLnBrk="0" hangingPunct="1">
       <a:defRPr sz="1200" kern="1200">
         <a:solidFill>
           <a:schemeClr val="tx1"/>
@@ -456,7 +456,7 @@
         <a:cs typeface="+mn-cs"/>
       </a:defRPr>
     </a:lvl3pPr>
-    <a:lvl4pPr marL="1371600" algn="l" defTabSz="914400" rtl="0" eaLnBrk="1" latinLnBrk="1" hangingPunct="1">
+    <a:lvl4pPr marL="1371600" algn="l" defTabSz="914400" rtl="0" eaLnBrk="1" latinLnBrk="0" hangingPunct="1">
       <a:defRPr sz="1200" kern="1200">
         <a:solidFill>
           <a:schemeClr val="tx1"/>
@@ -466,7 +466,7 @@
         <a:cs typeface="+mn-cs"/>
       </a:defRPr>
     </a:lvl4pPr>
-    <a:lvl5pPr marL="1828800" algn="l" defTabSz="914400" rtl="0" eaLnBrk="1" latinLnBrk="1" hangingPunct="1">
+    <a:lvl5pPr marL="1828800" algn="l" defTabSz="914400" rtl="0" eaLnBrk="1" latinLnBrk="0" hangingPunct="1">
       <a:defRPr sz="1200" kern="1200">
         <a:solidFill>
           <a:schemeClr val="tx1"/>
@@ -476,7 +476,7 @@
         <a:cs typeface="+mn-cs"/>
       </a:defRPr>
     </a:lvl5pPr>
-    <a:lvl6pPr marL="2286000" algn="l" defTabSz="914400" rtl="0" eaLnBrk="1" latinLnBrk="1" hangingPunct="1">
+    <a:lvl6pPr marL="2286000" algn="l" defTabSz="914400" rtl="0" eaLnBrk="1" latinLnBrk="0" hangingPunct="1">
       <a:defRPr sz="1200" kern="1200">
         <a:solidFill>
           <a:schemeClr val="tx1"/>
@@ -486,7 +486,7 @@
         <a:cs typeface="+mn-cs"/>
       </a:defRPr>
     </a:lvl6pPr>
-    <a:lvl7pPr marL="2743200" algn="l" defTabSz="914400" rtl="0" eaLnBrk="1" latinLnBrk="1" hangingPunct="1">
+    <a:lvl7pPr marL="2743200" algn="l" defTabSz="914400" rtl="0" eaLnBrk="1" latinLnBrk="0" hangingPunct="1">
       <a:defRPr sz="1200" kern="1200">
         <a:solidFill>
           <a:schemeClr val="tx1"/>
@@ -496,7 +496,7 @@
         <a:cs typeface="+mn-cs"/>
       </a:defRPr>
     </a:lvl7pPr>
-    <a:lvl8pPr marL="3200400" algn="l" defTabSz="914400" rtl="0" eaLnBrk="1" latinLnBrk="1" hangingPunct="1">
+    <a:lvl8pPr marL="3200400" algn="l" defTabSz="914400" rtl="0" eaLnBrk="1" latinLnBrk="0" hangingPunct="1">
       <a:defRPr sz="1200" kern="1200">
         <a:solidFill>
           <a:schemeClr val="tx1"/>
@@ -506,7 +506,7 @@
         <a:cs typeface="+mn-cs"/>
       </a:defRPr>
     </a:lvl8pPr>
-    <a:lvl9pPr marL="3657600" algn="l" defTabSz="914400" rtl="0" eaLnBrk="1" latinLnBrk="1" hangingPunct="1">
+    <a:lvl9pPr marL="3657600" algn="l" defTabSz="914400" rtl="0" eaLnBrk="1" latinLnBrk="0" hangingPunct="1">
       <a:defRPr sz="1200" kern="1200">
         <a:solidFill>
           <a:schemeClr val="tx1"/>
@@ -1534,7 +1534,7 @@
             <a:pPr lvl="0"/>
             <a:r>
               <a:rPr lang="ko-KR" sz="1200"/>
-              <a:t>결정 기록의 문장은 설계 용어집의 이름(CarrierSelector, DeliverySystem)을 그대로 쓴다.</a:t>
+              <a:t>결정 기록의 문장은 설계 용어집의 이름(CarrierSelector, DeliveryGateway)을 그대로 쓴다.</a:t>
             </a:r>
           </a:p>
           <a:p>
@@ -2207,7 +2207,7 @@
             <a:pPr lvl="0"/>
             <a:r>
               <a:rPr lang="ko-KR" sz="1200"/>
-              <a:t>되돌리기 어려운 결정만 무겁게 다룬다는 판단은 "05. 구조적 경계와 의존성"의 「06. 경계와 의존의 결정」과 같다.</a:t>
+              <a:t>되돌리기 어려운 결정만 무겁게 다룬다는 판단은 "05. 구조적 경계와 의존성"의 「04. 구조적 경계」과 같다.</a:t>
             </a:r>
           </a:p>
           <a:p>
@@ -3680,7 +3680,7 @@
   <p:hf hdr="0" ftr="0" dt="0"/>
   <p:txStyles>
     <p:titleStyle>
-      <a:lvl1pPr algn="l" rtl="0" eaLnBrk="0" fontAlgn="base" latinLnBrk="1" hangingPunct="0">
+      <a:lvl1pPr algn="l" rtl="0" eaLnBrk="0" fontAlgn="base" latinLnBrk="0" hangingPunct="0">
         <a:spcBef>
           <a:spcPct val="0"/>
         </a:spcBef>
@@ -3696,7 +3696,7 @@
           <a:cs typeface="+mj-cs"/>
         </a:defRPr>
       </a:lvl1pPr>
-      <a:lvl2pPr algn="l" rtl="0" eaLnBrk="0" fontAlgn="base" latinLnBrk="1" hangingPunct="0">
+      <a:lvl2pPr algn="l" rtl="0" eaLnBrk="0" fontAlgn="base" latinLnBrk="0" hangingPunct="0">
         <a:spcBef>
           <a:spcPct val="0"/>
         </a:spcBef>
@@ -3711,7 +3711,7 @@
           <a:ea typeface="맑은 고딕" pitchFamily="50" charset="-127"/>
         </a:defRPr>
       </a:lvl2pPr>
-      <a:lvl3pPr algn="l" rtl="0" eaLnBrk="0" fontAlgn="base" latinLnBrk="1" hangingPunct="0">
+      <a:lvl3pPr algn="l" rtl="0" eaLnBrk="0" fontAlgn="base" latinLnBrk="0" hangingPunct="0">
         <a:spcBef>
           <a:spcPct val="0"/>
         </a:spcBef>
@@ -3726,7 +3726,7 @@
           <a:ea typeface="맑은 고딕" pitchFamily="50" charset="-127"/>
         </a:defRPr>
       </a:lvl3pPr>
-      <a:lvl4pPr algn="l" rtl="0" eaLnBrk="0" fontAlgn="base" latinLnBrk="1" hangingPunct="0">
+      <a:lvl4pPr algn="l" rtl="0" eaLnBrk="0" fontAlgn="base" latinLnBrk="0" hangingPunct="0">
         <a:spcBef>
           <a:spcPct val="0"/>
         </a:spcBef>
@@ -3741,7 +3741,7 @@
           <a:ea typeface="맑은 고딕" pitchFamily="50" charset="-127"/>
         </a:defRPr>
       </a:lvl4pPr>
-      <a:lvl5pPr algn="l" rtl="0" eaLnBrk="0" fontAlgn="base" latinLnBrk="1" hangingPunct="0">
+      <a:lvl5pPr algn="l" rtl="0" eaLnBrk="0" fontAlgn="base" latinLnBrk="0" hangingPunct="0">
         <a:spcBef>
           <a:spcPct val="0"/>
         </a:spcBef>
@@ -3756,7 +3756,7 @@
           <a:ea typeface="맑은 고딕" pitchFamily="50" charset="-127"/>
         </a:defRPr>
       </a:lvl5pPr>
-      <a:lvl6pPr marL="457200" algn="ctr" rtl="0" fontAlgn="base" latinLnBrk="1">
+      <a:lvl6pPr marL="457200" algn="ctr" rtl="0" fontAlgn="base" latinLnBrk="0">
         <a:spcBef>
           <a:spcPct val="0"/>
         </a:spcBef>
@@ -3771,7 +3771,7 @@
           <a:ea typeface="맑은 고딕" pitchFamily="50" charset="-127"/>
         </a:defRPr>
       </a:lvl6pPr>
-      <a:lvl7pPr marL="914400" algn="ctr" rtl="0" fontAlgn="base" latinLnBrk="1">
+      <a:lvl7pPr marL="914400" algn="ctr" rtl="0" fontAlgn="base" latinLnBrk="0">
         <a:spcBef>
           <a:spcPct val="0"/>
         </a:spcBef>
@@ -3786,7 +3786,7 @@
           <a:ea typeface="맑은 고딕" pitchFamily="50" charset="-127"/>
         </a:defRPr>
       </a:lvl7pPr>
-      <a:lvl8pPr marL="1371600" algn="ctr" rtl="0" fontAlgn="base" latinLnBrk="1">
+      <a:lvl8pPr marL="1371600" algn="ctr" rtl="0" fontAlgn="base" latinLnBrk="0">
         <a:spcBef>
           <a:spcPct val="0"/>
         </a:spcBef>
@@ -3801,7 +3801,7 @@
           <a:ea typeface="맑은 고딕" pitchFamily="50" charset="-127"/>
         </a:defRPr>
       </a:lvl8pPr>
-      <a:lvl9pPr marL="1828800" algn="ctr" rtl="0" fontAlgn="base" latinLnBrk="1">
+      <a:lvl9pPr marL="1828800" algn="ctr" rtl="0" fontAlgn="base" latinLnBrk="0">
         <a:spcBef>
           <a:spcPct val="0"/>
         </a:spcBef>
@@ -3818,7 +3818,7 @@
       </a:lvl9pPr>
     </p:titleStyle>
     <p:bodyStyle>
-      <a:lvl1pPr marL="342900" indent="-342900" algn="l" rtl="0" eaLnBrk="0" fontAlgn="base" latinLnBrk="1" hangingPunct="0">
+      <a:lvl1pPr marL="342900" indent="-342900" algn="l" rtl="0" eaLnBrk="0" fontAlgn="base" latinLnBrk="0" hangingPunct="0">
         <a:spcBef>
           <a:spcPct val="20000"/>
         </a:spcBef>
@@ -3836,7 +3836,7 @@
           <a:cs typeface="+mn-cs"/>
         </a:defRPr>
       </a:lvl1pPr>
-      <a:lvl2pPr marL="742950" indent="-285750" algn="l" rtl="0" eaLnBrk="0" fontAlgn="base" latinLnBrk="1" hangingPunct="0">
+      <a:lvl2pPr marL="742950" indent="-285750" algn="l" rtl="0" eaLnBrk="0" fontAlgn="base" latinLnBrk="0" hangingPunct="0">
         <a:spcBef>
           <a:spcPct val="20000"/>
         </a:spcBef>
@@ -3854,7 +3854,7 @@
           <a:cs typeface="+mn-cs"/>
         </a:defRPr>
       </a:lvl2pPr>
-      <a:lvl3pPr marL="1143000" indent="-228600" algn="l" rtl="0" eaLnBrk="0" fontAlgn="base" latinLnBrk="1" hangingPunct="0">
+      <a:lvl3pPr marL="1143000" indent="-228600" algn="l" rtl="0" eaLnBrk="0" fontAlgn="base" latinLnBrk="0" hangingPunct="0">
         <a:spcBef>
           <a:spcPct val="20000"/>
         </a:spcBef>
@@ -3872,7 +3872,7 @@
           <a:cs typeface="+mn-cs"/>
         </a:defRPr>
       </a:lvl3pPr>
-      <a:lvl4pPr marL="1600200" indent="-228600" algn="l" rtl="0" eaLnBrk="0" fontAlgn="base" latinLnBrk="1" hangingPunct="0">
+      <a:lvl4pPr marL="1600200" indent="-228600" algn="l" rtl="0" eaLnBrk="0" fontAlgn="base" latinLnBrk="0" hangingPunct="0">
         <a:spcBef>
           <a:spcPct val="20000"/>
         </a:spcBef>
@@ -3890,7 +3890,7 @@
           <a:cs typeface="+mn-cs"/>
         </a:defRPr>
       </a:lvl4pPr>
-      <a:lvl5pPr marL="2057400" indent="-228600" algn="l" rtl="0" eaLnBrk="0" fontAlgn="base" latinLnBrk="1" hangingPunct="0">
+      <a:lvl5pPr marL="2057400" indent="-228600" algn="l" rtl="0" eaLnBrk="0" fontAlgn="base" latinLnBrk="0" hangingPunct="0">
         <a:spcBef>
           <a:spcPct val="20000"/>
         </a:spcBef>
@@ -3908,7 +3908,7 @@
           <a:cs typeface="+mn-cs"/>
         </a:defRPr>
       </a:lvl5pPr>
-      <a:lvl6pPr marL="2514600" indent="-228600" algn="l" defTabSz="914400" rtl="0" eaLnBrk="1" latinLnBrk="1" hangingPunct="1">
+      <a:lvl6pPr marL="2514600" indent="-228600" algn="l" defTabSz="914400" rtl="0" eaLnBrk="1" latinLnBrk="0" hangingPunct="1">
         <a:spcBef>
           <a:spcPct val="20000"/>
         </a:spcBef>
@@ -3923,7 +3923,7 @@
           <a:cs typeface="+mn-cs"/>
         </a:defRPr>
       </a:lvl6pPr>
-      <a:lvl7pPr marL="2971800" indent="-228600" algn="l" defTabSz="914400" rtl="0" eaLnBrk="1" latinLnBrk="1" hangingPunct="1">
+      <a:lvl7pPr marL="2971800" indent="-228600" algn="l" defTabSz="914400" rtl="0" eaLnBrk="1" latinLnBrk="0" hangingPunct="1">
         <a:spcBef>
           <a:spcPct val="20000"/>
         </a:spcBef>
@@ -3938,7 +3938,7 @@
           <a:cs typeface="+mn-cs"/>
         </a:defRPr>
       </a:lvl7pPr>
-      <a:lvl8pPr marL="3429000" indent="-228600" algn="l" defTabSz="914400" rtl="0" eaLnBrk="1" latinLnBrk="1" hangingPunct="1">
+      <a:lvl8pPr marL="3429000" indent="-228600" algn="l" defTabSz="914400" rtl="0" eaLnBrk="1" latinLnBrk="0" hangingPunct="1">
         <a:spcBef>
           <a:spcPct val="20000"/>
         </a:spcBef>
@@ -3953,7 +3953,7 @@
           <a:cs typeface="+mn-cs"/>
         </a:defRPr>
       </a:lvl8pPr>
-      <a:lvl9pPr marL="3886200" indent="-228600" algn="l" defTabSz="914400" rtl="0" eaLnBrk="1" latinLnBrk="1" hangingPunct="1">
+      <a:lvl9pPr marL="3886200" indent="-228600" algn="l" defTabSz="914400" rtl="0" eaLnBrk="1" latinLnBrk="0" hangingPunct="1">
         <a:spcBef>
           <a:spcPct val="20000"/>
         </a:spcBef>
@@ -3973,7 +3973,7 @@
       <a:defPPr>
         <a:defRPr lang="ko-KR"/>
       </a:defPPr>
-      <a:lvl1pPr marL="0" algn="l" defTabSz="914400" rtl="0" eaLnBrk="1" latinLnBrk="1" hangingPunct="1">
+      <a:lvl1pPr marL="0" algn="l" defTabSz="914400" rtl="0" eaLnBrk="1" latinLnBrk="0" hangingPunct="1">
         <a:defRPr sz="1800" kern="1200">
           <a:solidFill>
             <a:schemeClr val="tx1"/>
@@ -3983,7 +3983,7 @@
           <a:cs typeface="+mn-cs"/>
         </a:defRPr>
       </a:lvl1pPr>
-      <a:lvl2pPr marL="457200" algn="l" defTabSz="914400" rtl="0" eaLnBrk="1" latinLnBrk="1" hangingPunct="1">
+      <a:lvl2pPr marL="457200" algn="l" defTabSz="914400" rtl="0" eaLnBrk="1" latinLnBrk="0" hangingPunct="1">
         <a:defRPr sz="1800" kern="1200">
           <a:solidFill>
             <a:schemeClr val="tx1"/>
@@ -3993,7 +3993,7 @@
           <a:cs typeface="+mn-cs"/>
         </a:defRPr>
       </a:lvl2pPr>
-      <a:lvl3pPr marL="914400" algn="l" defTabSz="914400" rtl="0" eaLnBrk="1" latinLnBrk="1" hangingPunct="1">
+      <a:lvl3pPr marL="914400" algn="l" defTabSz="914400" rtl="0" eaLnBrk="1" latinLnBrk="0" hangingPunct="1">
         <a:defRPr sz="1800" kern="1200">
           <a:solidFill>
             <a:schemeClr val="tx1"/>
@@ -4003,7 +4003,7 @@
           <a:cs typeface="+mn-cs"/>
         </a:defRPr>
       </a:lvl3pPr>
-      <a:lvl4pPr marL="1371600" algn="l" defTabSz="914400" rtl="0" eaLnBrk="1" latinLnBrk="1" hangingPunct="1">
+      <a:lvl4pPr marL="1371600" algn="l" defTabSz="914400" rtl="0" eaLnBrk="1" latinLnBrk="0" hangingPunct="1">
         <a:defRPr sz="1800" kern="1200">
           <a:solidFill>
             <a:schemeClr val="tx1"/>
@@ -4013,7 +4013,7 @@
           <a:cs typeface="+mn-cs"/>
         </a:defRPr>
       </a:lvl4pPr>
-      <a:lvl5pPr marL="1828800" algn="l" defTabSz="914400" rtl="0" eaLnBrk="1" latinLnBrk="1" hangingPunct="1">
+      <a:lvl5pPr marL="1828800" algn="l" defTabSz="914400" rtl="0" eaLnBrk="1" latinLnBrk="0" hangingPunct="1">
         <a:defRPr sz="1800" kern="1200">
           <a:solidFill>
             <a:schemeClr val="tx1"/>
@@ -4023,7 +4023,7 @@
           <a:cs typeface="+mn-cs"/>
         </a:defRPr>
       </a:lvl5pPr>
-      <a:lvl6pPr marL="2286000" algn="l" defTabSz="914400" rtl="0" eaLnBrk="1" latinLnBrk="1" hangingPunct="1">
+      <a:lvl6pPr marL="2286000" algn="l" defTabSz="914400" rtl="0" eaLnBrk="1" latinLnBrk="0" hangingPunct="1">
         <a:defRPr sz="1800" kern="1200">
           <a:solidFill>
             <a:schemeClr val="tx1"/>
@@ -4033,7 +4033,7 @@
           <a:cs typeface="+mn-cs"/>
         </a:defRPr>
       </a:lvl6pPr>
-      <a:lvl7pPr marL="2743200" algn="l" defTabSz="914400" rtl="0" eaLnBrk="1" latinLnBrk="1" hangingPunct="1">
+      <a:lvl7pPr marL="2743200" algn="l" defTabSz="914400" rtl="0" eaLnBrk="1" latinLnBrk="0" hangingPunct="1">
         <a:defRPr sz="1800" kern="1200">
           <a:solidFill>
             <a:schemeClr val="tx1"/>
@@ -4043,7 +4043,7 @@
           <a:cs typeface="+mn-cs"/>
         </a:defRPr>
       </a:lvl7pPr>
-      <a:lvl8pPr marL="3200400" algn="l" defTabSz="914400" rtl="0" eaLnBrk="1" latinLnBrk="1" hangingPunct="1">
+      <a:lvl8pPr marL="3200400" algn="l" defTabSz="914400" rtl="0" eaLnBrk="1" latinLnBrk="0" hangingPunct="1">
         <a:defRPr sz="1800" kern="1200">
           <a:solidFill>
             <a:schemeClr val="tx1"/>
@@ -4053,7 +4053,7 @@
           <a:cs typeface="+mn-cs"/>
         </a:defRPr>
       </a:lvl8pPr>
-      <a:lvl9pPr marL="3657600" algn="l" defTabSz="914400" rtl="0" eaLnBrk="1" latinLnBrk="1" hangingPunct="1">
+      <a:lvl9pPr marL="3657600" algn="l" defTabSz="914400" rtl="0" eaLnBrk="1" latinLnBrk="0" hangingPunct="1">
         <a:defRPr sz="1800" kern="1200">
           <a:solidFill>
             <a:schemeClr val="tx1"/>
@@ -5283,7 +5283,7 @@
                 <a:latin typeface="맑은 고딕"/>
                 <a:ea typeface="맑은 고딕"/>
               </a:rPr>
-              <a:t>DeliverySystem</a:t>
+              <a:t>DeliveryGateway</a:t>
             </a:r>
             <a:r>
               <a:rPr sz="1800" b="0">
@@ -7645,7 +7645,7 @@
           </p:nvPr>
         </p:nvGraphicFramePr>
         <p:xfrm>
-          <a:off x="2111566" y="2801048"/>
+          <a:off x="2111566" y="2649162"/>
           <a:ext cx="4907280" cy="3873500"/>
         </p:xfrm>
         <a:graphic>
@@ -8384,7 +8384,7 @@
         <p:spPr>
           <a:xfrm>
             <a:off x="365760" y="960120"/>
-            <a:ext cx="8412480" cy="1739328"/>
+            <a:ext cx="8412480" cy="1587442"/>
           </a:xfrm>
           <a:prstGeom prst="rect">
             <a:avLst/>
@@ -8537,7 +8537,7 @@
                 <a:latin typeface="맑은 고딕"/>
                 <a:ea typeface="맑은 고딕"/>
               </a:rPr>
-              <a:t>Craig Larman, 2004</a:t>
+              <a:t>[Larman 2004]</a:t>
             </a:r>
           </a:p>
         </p:txBody>
@@ -9289,7 +9289,7 @@
                           <a:ea typeface="맑은 고딕" panose="020B0503020000020004" pitchFamily="34" charset="-127"/>
                           <a:cs typeface="맑은 고딕"/>
                         </a:rPr>
-                        <a:t>DeliverySystem 약속</a:t>
+                        <a:t>DeliveryGateway 약속</a:t>
                       </a:r>
                     </a:p>
                   </a:txBody>
@@ -9648,7 +9648,7 @@
                 <a:latin typeface="맑은 고딕"/>
                 <a:ea typeface="맑은 고딕"/>
               </a:rPr>
-              <a:t>Craig Larman, 2004</a:t>
+              <a:t>[Larman 2004]</a:t>
             </a:r>
           </a:p>
         </p:txBody>
@@ -10344,7 +10344,7 @@
                           <a:ea typeface="맑은 고딕" panose="020B0503020000020004" pitchFamily="34" charset="-127"/>
                           <a:cs typeface="맑은 고딕"/>
                         </a:rPr>
-                        <a:t>DeliverySystem(업무 경계의 약속)</a:t>
+                        <a:t>DeliveryGateway(업무 경계의 약속)</a:t>
                       </a:r>
                     </a:p>
                   </a:txBody>
@@ -10779,7 +10779,7 @@
                 <a:latin typeface="맑은 고딕"/>
                 <a:ea typeface="맑은 고딕"/>
               </a:rPr>
-              <a:t>Craig Larman, 2004</a:t>
+              <a:t>[Larman 2004]</a:t>
             </a:r>
           </a:p>
         </p:txBody>
@@ -11910,7 +11910,7 @@
                 <a:latin typeface="맑은 고딕"/>
                 <a:ea typeface="맑은 고딕"/>
               </a:rPr>
-              <a:t>Craig Larman, 2004</a:t>
+              <a:t>[Larman 2004]</a:t>
             </a:r>
           </a:p>
         </p:txBody>
@@ -14133,7 +14133,7 @@
                 <a:latin typeface="맑은 고딕"/>
                 <a:ea typeface="맑은 고딕"/>
               </a:rPr>
-              <a:t>C. A. R. Hoare, 1981</a:t>
+              <a:t>[Hoare 1981]</a:t>
             </a:r>
           </a:p>
           <a:p>
@@ -14216,7 +14216,7 @@
                 <a:latin typeface="맑은 고딕"/>
                 <a:ea typeface="맑은 고딕"/>
               </a:rPr>
-              <a:t>Martin Fowler, 2015</a:t>
+              <a:t>[Fowler 2015b]</a:t>
             </a:r>
           </a:p>
         </p:txBody>
@@ -19601,7 +19601,7 @@
                 <a:latin typeface="맑은 고딕"/>
                 <a:ea typeface="맑은 고딕"/>
               </a:rPr>
-              <a:t>Craig Larman, 2004</a:t>
+              <a:t>[Larman 2004]</a:t>
             </a:r>
           </a:p>
         </p:txBody>
@@ -20697,7 +20697,7 @@
                 <a:latin typeface="맑은 고딕"/>
                 <a:ea typeface="맑은 고딕"/>
               </a:rPr>
-              <a:t>"We will keep a collection of records for "architecturally significant" decisions: those that affect the structure, non-functional characteristics, dependencies, interfaces, or construction techniques.", Michael Nygard, 2011</a:t>
+              <a:t>"We will keep a collection of records for "architecturally significant" decisions: those that affect the structure, non-functional characteristics, dependencies, interfaces, or construction techniques.", [Nygard 2011]</a:t>
             </a:r>
           </a:p>
         </p:txBody>
@@ -21094,7 +21094,7 @@
                 <a:latin typeface="Consolas"/>
                 <a:ea typeface="맑은 고딕"/>
               </a:rPr>
-              <a:t>결정: delivery에 CarrierSelector를 둔다. 선택기는 DeliverySystem 약속만 알고,</a:t>
+              <a:t>결정: delivery에 CarrierSelector를 둔다. 선택기는 DeliveryGateway 약속만 알고,</a:t>
             </a:r>
           </a:p>
           <a:p>
@@ -21865,7 +21865,7 @@
                 <a:latin typeface="Consolas"/>
                 <a:ea typeface="맑은 고딕"/>
               </a:rPr>
-              <a:t>        DeliverySystem carrier = shippingAddress.startsWith(sameDayArea) ? sameDay : regular;</a:t>
+              <a:t>        DeliveryGateway carrier = shippingAddress.startsWith(sameDayArea) ? sameDay : regular;</a:t>
             </a:r>
           </a:p>
           <a:p>
@@ -22044,8 +22044,8 @@
         </p:blipFill>
         <p:spPr>
           <a:xfrm>
-            <a:off x="3201865" y="1842998"/>
-            <a:ext cx="2740269" cy="1304192"/>
+            <a:off x="3123712" y="1842998"/>
+            <a:ext cx="2896577" cy="1304192"/>
           </a:xfrm>
           <a:prstGeom prst="rect">
             <a:avLst/>
@@ -32852,6 +32852,27 @@
             </a:r>
           </a:p>
           <a:p>
+            <a:pPr marL="342900" indent="0">
+              <a:spcBef>
+                <a:spcPts val="600"/>
+              </a:spcBef>
+              <a:spcAft>
+                <a:spcPts val="600"/>
+              </a:spcAft>
+              <a:buNone/>
+            </a:pPr>
+            <a:r>
+              <a:rPr sz="1800" b="1">
+                <a:solidFill>
+                  <a:srgbClr val="000000"/>
+                </a:solidFill>
+                <a:latin typeface="맑은 고딕"/>
+                <a:ea typeface="맑은 고딕"/>
+              </a:rPr>
+              <a:t>설계 대안 평가의 핵심</a:t>
+            </a:r>
+          </a:p>
+          <a:p>
             <a:pPr lvl="2" marL="723900" indent="-368300">
               <a:spcBef>
                 <a:spcPts val="600"/>
@@ -32864,6 +32885,16 @@
               <a:buChar char=""/>
             </a:pPr>
             <a:r>
+              <a:rPr sz="1800" b="1">
+                <a:solidFill>
+                  <a:srgbClr val="000000"/>
+                </a:solidFill>
+                <a:latin typeface="맑은 고딕"/>
+                <a:ea typeface="맑은 고딕"/>
+              </a:rPr>
+              <a:t>절충</a:t>
+            </a:r>
+            <a:r>
               <a:rPr sz="1800" b="0">
                 <a:solidFill>
                   <a:srgbClr val="000000"/>
@@ -32871,30 +32902,7 @@
                 <a:latin typeface="맑은 고딕"/>
                 <a:ea typeface="맑은 고딕"/>
               </a:rPr>
-              <a:t>설계 대안 평가의 핵심</a:t>
-            </a:r>
-          </a:p>
-          <a:p>
-            <a:pPr lvl="3" marL="1077913" indent="-354013">
-              <a:spcBef>
-                <a:spcPts val="600"/>
-              </a:spcBef>
-              <a:spcAft>
-                <a:spcPts val="600"/>
-              </a:spcAft>
-              <a:buSzPct val="90000"/>
-              <a:buFont typeface="Wingdings" pitchFamily="2" charset="2"/>
-              <a:buChar char=""/>
-            </a:pPr>
-            <a:r>
-              <a:rPr sz="1600" b="1">
-                <a:solidFill>
-                  <a:srgbClr val="000000"/>
-                </a:solidFill>
-                <a:latin typeface="맑은 고딕"/>
-                <a:ea typeface="맑은 고딕"/>
-              </a:rPr>
-              <a:t>절충</a:t>
+              <a:t> —</a:t>
             </a:r>
             <a:r>
               <a:rPr sz="1600" b="0">
@@ -32904,232 +32912,7 @@
                 <a:latin typeface="맑은 고딕"/>
                 <a:ea typeface="맑은 고딕"/>
               </a:rPr>
-              <a:t> —</a:t>
-            </a:r>
-            <a:r>
-              <a:rPr sz="1400" b="0">
-                <a:solidFill>
-                  <a:srgbClr val="000000"/>
-                </a:solidFill>
-                <a:latin typeface="맑은 고딕"/>
-                <a:ea typeface="맑은 고딕"/>
-              </a:rPr>
               <a:t> 좋은 설계는 원칙의 개수가 아니라 현재에 맞는 절충의 선택이다</a:t>
-            </a:r>
-          </a:p>
-          <a:p>
-            <a:pPr lvl="3" marL="1077913" indent="-354013">
-              <a:spcBef>
-                <a:spcPts val="600"/>
-              </a:spcBef>
-              <a:spcAft>
-                <a:spcPts val="600"/>
-              </a:spcAft>
-              <a:buSzPct val="90000"/>
-              <a:buFont typeface="Wingdings" pitchFamily="2" charset="2"/>
-              <a:buChar char=""/>
-            </a:pPr>
-            <a:r>
-              <a:rPr sz="1600" b="1">
-                <a:solidFill>
-                  <a:srgbClr val="000000"/>
-                </a:solidFill>
-                <a:latin typeface="맑은 고딕"/>
-                <a:ea typeface="맑은 고딕"/>
-              </a:rPr>
-              <a:t>대안</a:t>
-            </a:r>
-            <a:r>
-              <a:rPr sz="1600" b="0">
-                <a:solidFill>
-                  <a:srgbClr val="000000"/>
-                </a:solidFill>
-                <a:latin typeface="맑은 고딕"/>
-                <a:ea typeface="맑은 고딕"/>
-              </a:rPr>
-              <a:t> —</a:t>
-            </a:r>
-            <a:r>
-              <a:rPr sz="1400" b="0">
-                <a:solidFill>
-                  <a:srgbClr val="000000"/>
-                </a:solidFill>
-                <a:latin typeface="맑은 고딕"/>
-                <a:ea typeface="맑은 고딕"/>
-              </a:rPr>
-              <a:t> 가장 단순한 대안과 가장 유연한 대안을 양 끝에 둔다</a:t>
-            </a:r>
-          </a:p>
-          <a:p>
-            <a:pPr lvl="3" marL="1077913" indent="-354013">
-              <a:spcBef>
-                <a:spcPts val="600"/>
-              </a:spcBef>
-              <a:spcAft>
-                <a:spcPts val="600"/>
-              </a:spcAft>
-              <a:buSzPct val="90000"/>
-              <a:buFont typeface="Wingdings" pitchFamily="2" charset="2"/>
-              <a:buChar char=""/>
-            </a:pPr>
-            <a:r>
-              <a:rPr sz="1600" b="1">
-                <a:solidFill>
-                  <a:srgbClr val="000000"/>
-                </a:solidFill>
-                <a:latin typeface="맑은 고딕"/>
-                <a:ea typeface="맑은 고딕"/>
-              </a:rPr>
-              <a:t>평가 흐름</a:t>
-            </a:r>
-            <a:r>
-              <a:rPr sz="1600" b="0">
-                <a:solidFill>
-                  <a:srgbClr val="000000"/>
-                </a:solidFill>
-                <a:latin typeface="맑은 고딕"/>
-                <a:ea typeface="맑은 고딕"/>
-              </a:rPr>
-              <a:t> —</a:t>
-            </a:r>
-            <a:r>
-              <a:rPr sz="1400" b="0">
-                <a:solidFill>
-                  <a:srgbClr val="000000"/>
-                </a:solidFill>
-                <a:latin typeface="맑은 고딕"/>
-                <a:ea typeface="맑은 고딕"/>
-              </a:rPr>
-              <a:t> 변경 영향 → 응집·결합 → 의존 → 추상화 비용 → 원칙·패턴 → 절충</a:t>
-            </a:r>
-          </a:p>
-          <a:p>
-            <a:pPr lvl="3" marL="1077913" indent="-354013">
-              <a:spcBef>
-                <a:spcPts val="600"/>
-              </a:spcBef>
-              <a:spcAft>
-                <a:spcPts val="600"/>
-              </a:spcAft>
-              <a:buSzPct val="90000"/>
-              <a:buFont typeface="Wingdings" pitchFamily="2" charset="2"/>
-              <a:buChar char=""/>
-            </a:pPr>
-            <a:r>
-              <a:rPr sz="1600" b="1">
-                <a:solidFill>
-                  <a:srgbClr val="000000"/>
-                </a:solidFill>
-                <a:latin typeface="맑은 고딕"/>
-                <a:ea typeface="맑은 고딕"/>
-              </a:rPr>
-              <a:t>압력</a:t>
-            </a:r>
-            <a:r>
-              <a:rPr sz="1600" b="0">
-                <a:solidFill>
-                  <a:srgbClr val="000000"/>
-                </a:solidFill>
-                <a:latin typeface="맑은 고딕"/>
-                <a:ea typeface="맑은 고딕"/>
-              </a:rPr>
-              <a:t> —</a:t>
-            </a:r>
-            <a:r>
-              <a:rPr sz="1400" b="0">
-                <a:solidFill>
-                  <a:srgbClr val="000000"/>
-                </a:solidFill>
-                <a:latin typeface="맑은 고딕"/>
-                <a:ea typeface="맑은 고딕"/>
-              </a:rPr>
-              <a:t> 실제 변경은 근거로, 추측한 변경은 다시 열 조건으로</a:t>
-            </a:r>
-          </a:p>
-          <a:p>
-            <a:pPr lvl="3" marL="1077913" indent="-354013">
-              <a:spcBef>
-                <a:spcPts val="600"/>
-              </a:spcBef>
-              <a:spcAft>
-                <a:spcPts val="600"/>
-              </a:spcAft>
-              <a:buSzPct val="90000"/>
-              <a:buFont typeface="Wingdings" pitchFamily="2" charset="2"/>
-              <a:buChar char=""/>
-            </a:pPr>
-            <a:r>
-              <a:rPr sz="1600" b="1">
-                <a:solidFill>
-                  <a:srgbClr val="000000"/>
-                </a:solidFill>
-                <a:latin typeface="맑은 고딕"/>
-                <a:ea typeface="맑은 고딕"/>
-              </a:rPr>
-              <a:t>기록</a:t>
-            </a:r>
-            <a:r>
-              <a:rPr sz="1600" b="0">
-                <a:solidFill>
-                  <a:srgbClr val="000000"/>
-                </a:solidFill>
-                <a:latin typeface="맑은 고딕"/>
-                <a:ea typeface="맑은 고딕"/>
-              </a:rPr>
-              <a:t> —</a:t>
-            </a:r>
-            <a:r>
-              <a:rPr sz="1400" b="0">
-                <a:solidFill>
-                  <a:srgbClr val="000000"/>
-                </a:solidFill>
-                <a:latin typeface="맑은 고딕"/>
-                <a:ea typeface="맑은 고딕"/>
-              </a:rPr>
-              <a:t> 결정 기록에 맥락·결정·결과·포기한 대안·다시 열 조건</a:t>
-            </a:r>
-          </a:p>
-          <a:p>
-            <a:pPr lvl="3" marL="1077913" indent="-354013">
-              <a:spcBef>
-                <a:spcPts val="600"/>
-              </a:spcBef>
-              <a:spcAft>
-                <a:spcPts val="600"/>
-              </a:spcAft>
-              <a:buSzPct val="90000"/>
-              <a:buFont typeface="Wingdings" pitchFamily="2" charset="2"/>
-              <a:buChar char=""/>
-            </a:pPr>
-            <a:r>
-              <a:rPr sz="1600" b="1">
-                <a:solidFill>
-                  <a:srgbClr val="000000"/>
-                </a:solidFill>
-                <a:latin typeface="맑은 고딕"/>
-                <a:ea typeface="맑은 고딕"/>
-              </a:rPr>
-              <a:t>잘못된 관행</a:t>
-            </a:r>
-            <a:r>
-              <a:rPr sz="1600" b="0">
-                <a:solidFill>
-                  <a:srgbClr val="000000"/>
-                </a:solidFill>
-                <a:latin typeface="맑은 고딕"/>
-                <a:ea typeface="맑은 고딕"/>
-              </a:rPr>
-              <a:t> —</a:t>
-            </a:r>
-            <a:r>
-              <a:rPr sz="1400" b="0">
-                <a:solidFill>
-                  <a:srgbClr val="000000"/>
-                </a:solidFill>
-                <a:latin typeface="맑은 고딕"/>
-                <a:ea typeface="맑은 고딕"/>
-              </a:rPr>
-              <a:t> 원칙 점수 매기기, 대안 하나, 기록 없는 결정, 미래로 평가하기</a:t>
             </a:r>
           </a:p>
           <a:p>
@@ -33145,6 +32928,16 @@
               <a:buChar char=""/>
             </a:pPr>
             <a:r>
+              <a:rPr sz="1800" b="1">
+                <a:solidFill>
+                  <a:srgbClr val="000000"/>
+                </a:solidFill>
+                <a:latin typeface="맑은 고딕"/>
+                <a:ea typeface="맑은 고딕"/>
+              </a:rPr>
+              <a:t>대안</a:t>
+            </a:r>
+            <a:r>
               <a:rPr sz="1800" b="0">
                 <a:solidFill>
                   <a:srgbClr val="000000"/>
@@ -33152,11 +32945,21 @@
                 <a:latin typeface="맑은 고딕"/>
                 <a:ea typeface="맑은 고딕"/>
               </a:rPr>
-              <a:t>다음 세션</a:t>
-            </a:r>
-          </a:p>
-          <a:p>
-            <a:pPr lvl="3" marL="1077913" indent="-354013">
+              <a:t> —</a:t>
+            </a:r>
+            <a:r>
+              <a:rPr sz="1600" b="0">
+                <a:solidFill>
+                  <a:srgbClr val="000000"/>
+                </a:solidFill>
+                <a:latin typeface="맑은 고딕"/>
+                <a:ea typeface="맑은 고딕"/>
+              </a:rPr>
+              <a:t> 가장 단순한 대안과 가장 유연한 대안을 양 끝에 둔다</a:t>
+            </a:r>
+          </a:p>
+          <a:p>
+            <a:pPr lvl="2" marL="723900" indent="-368300">
               <a:spcBef>
                 <a:spcPts val="600"/>
               </a:spcBef>
@@ -33165,9 +32968,29 @@
               </a:spcAft>
               <a:buSzPct val="90000"/>
               <a:buFont typeface="Wingdings" pitchFamily="2" charset="2"/>
-              <a:buChar char=""/>
+              <a:buChar char=""/>
             </a:pPr>
             <a:r>
+              <a:rPr sz="1800" b="1">
+                <a:solidFill>
+                  <a:srgbClr val="000000"/>
+                </a:solidFill>
+                <a:latin typeface="맑은 고딕"/>
+                <a:ea typeface="맑은 고딕"/>
+              </a:rPr>
+              <a:t>평가 흐름</a:t>
+            </a:r>
+            <a:r>
+              <a:rPr sz="1800" b="0">
+                <a:solidFill>
+                  <a:srgbClr val="000000"/>
+                </a:solidFill>
+                <a:latin typeface="맑은 고딕"/>
+                <a:ea typeface="맑은 고딕"/>
+              </a:rPr>
+              <a:t> —</a:t>
+            </a:r>
+            <a:r>
               <a:rPr sz="1600" b="0">
                 <a:solidFill>
                   <a:srgbClr val="000000"/>
@@ -33175,10 +32998,183 @@
                 <a:latin typeface="맑은 고딕"/>
                 <a:ea typeface="맑은 고딕"/>
               </a:rPr>
+              <a:t> 변경 영향 → 응집·결합 → 의존 → 추상화 비용 → 원칙·패턴 → 절충</a:t>
+            </a:r>
+          </a:p>
+          <a:p>
+            <a:pPr lvl="2" marL="723900" indent="-368300">
+              <a:spcBef>
+                <a:spcPts val="600"/>
+              </a:spcBef>
+              <a:spcAft>
+                <a:spcPts val="600"/>
+              </a:spcAft>
+              <a:buSzPct val="90000"/>
+              <a:buFont typeface="Wingdings" pitchFamily="2" charset="2"/>
+              <a:buChar char=""/>
+            </a:pPr>
+            <a:r>
+              <a:rPr sz="1800" b="1">
+                <a:solidFill>
+                  <a:srgbClr val="000000"/>
+                </a:solidFill>
+                <a:latin typeface="맑은 고딕"/>
+                <a:ea typeface="맑은 고딕"/>
+              </a:rPr>
+              <a:t>압력</a:t>
+            </a:r>
+            <a:r>
+              <a:rPr sz="1800" b="0">
+                <a:solidFill>
+                  <a:srgbClr val="000000"/>
+                </a:solidFill>
+                <a:latin typeface="맑은 고딕"/>
+                <a:ea typeface="맑은 고딕"/>
+              </a:rPr>
+              <a:t> —</a:t>
+            </a:r>
+            <a:r>
+              <a:rPr sz="1600" b="0">
+                <a:solidFill>
+                  <a:srgbClr val="000000"/>
+                </a:solidFill>
+                <a:latin typeface="맑은 고딕"/>
+                <a:ea typeface="맑은 고딕"/>
+              </a:rPr>
+              <a:t> 실제 변경은 근거로, 추측한 변경은 다시 열 조건으로</a:t>
+            </a:r>
+          </a:p>
+          <a:p>
+            <a:pPr lvl="2" marL="723900" indent="-368300">
+              <a:spcBef>
+                <a:spcPts val="600"/>
+              </a:spcBef>
+              <a:spcAft>
+                <a:spcPts val="600"/>
+              </a:spcAft>
+              <a:buSzPct val="90000"/>
+              <a:buFont typeface="Wingdings" pitchFamily="2" charset="2"/>
+              <a:buChar char=""/>
+            </a:pPr>
+            <a:r>
+              <a:rPr sz="1800" b="1">
+                <a:solidFill>
+                  <a:srgbClr val="000000"/>
+                </a:solidFill>
+                <a:latin typeface="맑은 고딕"/>
+                <a:ea typeface="맑은 고딕"/>
+              </a:rPr>
+              <a:t>기록</a:t>
+            </a:r>
+            <a:r>
+              <a:rPr sz="1800" b="0">
+                <a:solidFill>
+                  <a:srgbClr val="000000"/>
+                </a:solidFill>
+                <a:latin typeface="맑은 고딕"/>
+                <a:ea typeface="맑은 고딕"/>
+              </a:rPr>
+              <a:t> —</a:t>
+            </a:r>
+            <a:r>
+              <a:rPr sz="1600" b="0">
+                <a:solidFill>
+                  <a:srgbClr val="000000"/>
+                </a:solidFill>
+                <a:latin typeface="맑은 고딕"/>
+                <a:ea typeface="맑은 고딕"/>
+              </a:rPr>
+              <a:t> 결정 기록에 맥락·결정·결과·포기한 대안·다시 열 조건</a:t>
+            </a:r>
+          </a:p>
+          <a:p>
+            <a:pPr lvl="2" marL="723900" indent="-368300">
+              <a:spcBef>
+                <a:spcPts val="600"/>
+              </a:spcBef>
+              <a:spcAft>
+                <a:spcPts val="600"/>
+              </a:spcAft>
+              <a:buSzPct val="90000"/>
+              <a:buFont typeface="Wingdings" pitchFamily="2" charset="2"/>
+              <a:buChar char=""/>
+            </a:pPr>
+            <a:r>
+              <a:rPr sz="1800" b="1">
+                <a:solidFill>
+                  <a:srgbClr val="000000"/>
+                </a:solidFill>
+                <a:latin typeface="맑은 고딕"/>
+                <a:ea typeface="맑은 고딕"/>
+              </a:rPr>
+              <a:t>잘못된 관행</a:t>
+            </a:r>
+            <a:r>
+              <a:rPr sz="1800" b="0">
+                <a:solidFill>
+                  <a:srgbClr val="000000"/>
+                </a:solidFill>
+                <a:latin typeface="맑은 고딕"/>
+                <a:ea typeface="맑은 고딕"/>
+              </a:rPr>
+              <a:t> —</a:t>
+            </a:r>
+            <a:r>
+              <a:rPr sz="1600" b="0">
+                <a:solidFill>
+                  <a:srgbClr val="000000"/>
+                </a:solidFill>
+                <a:latin typeface="맑은 고딕"/>
+                <a:ea typeface="맑은 고딕"/>
+              </a:rPr>
+              <a:t> 원칙 점수 매기기, 대안 하나, 기록 없는 결정, 미래로 평가하기</a:t>
+            </a:r>
+          </a:p>
+          <a:p>
+            <a:pPr marL="342900" indent="0">
+              <a:spcBef>
+                <a:spcPts val="600"/>
+              </a:spcBef>
+              <a:spcAft>
+                <a:spcPts val="600"/>
+              </a:spcAft>
+              <a:buNone/>
+            </a:pPr>
+            <a:r>
+              <a:rPr sz="1800" b="1">
+                <a:solidFill>
+                  <a:srgbClr val="000000"/>
+                </a:solidFill>
+                <a:latin typeface="맑은 고딕"/>
+                <a:ea typeface="맑은 고딕"/>
+              </a:rPr>
+              <a:t>다음 세션</a:t>
+            </a:r>
+          </a:p>
+          <a:p>
+            <a:pPr lvl="2" marL="723900" indent="-368300">
+              <a:spcBef>
+                <a:spcPts val="600"/>
+              </a:spcBef>
+              <a:spcAft>
+                <a:spcPts val="600"/>
+              </a:spcAft>
+              <a:buSzPct val="90000"/>
+              <a:buFont typeface="Wingdings" pitchFamily="2" charset="2"/>
+              <a:buChar char=""/>
+            </a:pPr>
+            <a:r>
+              <a:rPr sz="1800" b="0">
+                <a:solidFill>
+                  <a:srgbClr val="000000"/>
+                </a:solidFill>
+                <a:latin typeface="맑은 고딕"/>
+                <a:ea typeface="맑은 고딕"/>
+              </a:rPr>
               <a:t>"</a:t>
             </a:r>
             <a:r>
-              <a:rPr sz="1600" b="1">
+              <a:rPr sz="1800" b="1">
                 <a:solidFill>
                   <a:srgbClr val="000000"/>
                 </a:solidFill>
@@ -33188,17 +33184,17 @@
               <a:t>10. 기술 제약과 도메인 의미 보존</a:t>
             </a:r>
             <a:r>
+              <a:rPr sz="1800" b="0">
+                <a:solidFill>
+                  <a:srgbClr val="000000"/>
+                </a:solidFill>
+                <a:latin typeface="맑은 고딕"/>
+                <a:ea typeface="맑은 고딕"/>
+              </a:rPr>
+              <a:t>" —</a:t>
+            </a:r>
+            <a:r>
               <a:rPr sz="1600" b="0">
-                <a:solidFill>
-                  <a:srgbClr val="000000"/>
-                </a:solidFill>
-                <a:latin typeface="맑은 고딕"/>
-                <a:ea typeface="맑은 고딕"/>
-              </a:rPr>
-              <a:t>" —</a:t>
-            </a:r>
-            <a:r>
-              <a:rPr sz="1400" b="0">
                 <a:solidFill>
                   <a:srgbClr val="000000"/>
                 </a:solidFill>
@@ -34375,7 +34371,7 @@
                 <a:latin typeface="맑은 고딕"/>
                 <a:ea typeface="맑은 고딕"/>
               </a:rPr>
-              <a:t>C. A. R. Hoare, 1981</a:t>
+              <a:t>[Hoare 1981]</a:t>
             </a:r>
           </a:p>
           <a:p>

--- a/courses/ooad/sessions/s09.pptx
+++ b/courses/ooad/sessions/s09.pptx
@@ -4542,6 +4542,48 @@
               <a:t>15. 원칙과 패턴</a:t>
             </a:r>
           </a:p>
+          <a:p>
+            <a:pPr lvl="1" marL="355600" indent="0">
+              <a:spcBef>
+                <a:spcPts val="300"/>
+              </a:spcBef>
+              <a:spcAft>
+                <a:spcPts val="300"/>
+              </a:spcAft>
+              <a:buNone/>
+            </a:pPr>
+            <a:r>
+              <a:rPr sz="1600" b="0">
+                <a:solidFill>
+                  <a:srgbClr val="000000"/>
+                </a:solidFill>
+                <a:latin typeface="맑은 고딕"/>
+                <a:ea typeface="맑은 고딕"/>
+              </a:rPr>
+              <a:t>16. 단순함</a:t>
+            </a:r>
+          </a:p>
+          <a:p>
+            <a:pPr lvl="1" marL="355600" indent="0">
+              <a:spcBef>
+                <a:spcPts val="300"/>
+              </a:spcBef>
+              <a:spcAft>
+                <a:spcPts val="300"/>
+              </a:spcAft>
+              <a:buNone/>
+            </a:pPr>
+            <a:r>
+              <a:rPr sz="1600" b="0">
+                <a:solidFill>
+                  <a:srgbClr val="000000"/>
+                </a:solidFill>
+                <a:latin typeface="맑은 고딕"/>
+                <a:ea typeface="맑은 고딕"/>
+              </a:rPr>
+              <a:t>17. 품질 요구</a:t>
+            </a:r>
+          </a:p>
         </p:txBody>
       </p:sp>
       <p:sp>
@@ -4664,7 +4706,7 @@
                 <a:latin typeface="맑은 고딕"/>
                 <a:ea typeface="맑은 고딕"/>
               </a:rPr>
-              <a:t>16. 단순함</a:t>
+              <a:t>18. 절충</a:t>
             </a:r>
           </a:p>
           <a:p>
@@ -4685,7 +4727,7 @@
                 <a:latin typeface="맑은 고딕"/>
                 <a:ea typeface="맑은 고딕"/>
               </a:rPr>
-              <a:t>17. 품질 요구</a:t>
+              <a:t>19. 선택과 근거</a:t>
             </a:r>
           </a:p>
           <a:p>
@@ -4706,7 +4748,7 @@
                 <a:latin typeface="맑은 고딕"/>
                 <a:ea typeface="맑은 고딕"/>
               </a:rPr>
-              <a:t>18. 절충</a:t>
+              <a:t>20. 포기한 대안</a:t>
             </a:r>
           </a:p>
           <a:p>
@@ -4727,7 +4769,7 @@
                 <a:latin typeface="맑은 고딕"/>
                 <a:ea typeface="맑은 고딕"/>
               </a:rPr>
-              <a:t>19. 선택과 근거</a:t>
+              <a:t>21. 결정 기록</a:t>
             </a:r>
           </a:p>
           <a:p>
@@ -4748,7 +4790,7 @@
                 <a:latin typeface="맑은 고딕"/>
                 <a:ea typeface="맑은 고딕"/>
               </a:rPr>
-              <a:t>20. 포기한 대안</a:t>
+              <a:t>22. 결정 기록 예</a:t>
             </a:r>
           </a:p>
           <a:p>
@@ -4769,7 +4811,7 @@
                 <a:latin typeface="맑은 고딕"/>
                 <a:ea typeface="맑은 고딕"/>
               </a:rPr>
-              <a:t>21. 결정 기록</a:t>
+              <a:t>23. 선택한 설계</a:t>
             </a:r>
           </a:p>
           <a:p>
@@ -4790,7 +4832,7 @@
                 <a:latin typeface="맑은 고딕"/>
                 <a:ea typeface="맑은 고딕"/>
               </a:rPr>
-              <a:t>22. 결정 기록 예</a:t>
+              <a:t>24. 선택 코드</a:t>
             </a:r>
           </a:p>
           <a:p>
@@ -4811,7 +4853,7 @@
                 <a:latin typeface="맑은 고딕"/>
                 <a:ea typeface="맑은 고딕"/>
               </a:rPr>
-              <a:t>23. 선택한 설계</a:t>
+              <a:t>25. 선택 테스트</a:t>
             </a:r>
           </a:p>
           <a:p>
@@ -4832,7 +4874,17 @@
                 <a:latin typeface="맑은 고딕"/>
                 <a:ea typeface="맑은 고딕"/>
               </a:rPr>
-              <a:t>24. 선택 코드</a:t>
+              <a:t>26. 두 번째 평가 —</a:t>
+            </a:r>
+            <a:r>
+              <a:rPr sz="1400" b="0">
+                <a:solidFill>
+                  <a:srgbClr val="000000"/>
+                </a:solidFill>
+                <a:latin typeface="맑은 고딕"/>
+                <a:ea typeface="맑은 고딕"/>
+              </a:rPr>
+              <a:t> 주문 항목의 생성</a:t>
             </a:r>
           </a:p>
           <a:p>
@@ -4853,7 +4905,17 @@
                 <a:latin typeface="맑은 고딕"/>
                 <a:ea typeface="맑은 고딕"/>
               </a:rPr>
-              <a:t>25. 선택 테스트</a:t>
+              <a:t>27. 잘못된 관행 —</a:t>
+            </a:r>
+            <a:r>
+              <a:rPr sz="1400" b="0">
+                <a:solidFill>
+                  <a:srgbClr val="000000"/>
+                </a:solidFill>
+                <a:latin typeface="맑은 고딕"/>
+                <a:ea typeface="맑은 고딕"/>
+              </a:rPr>
+              <a:t> 원칙 점수 매기기</a:t>
             </a:r>
           </a:p>
           <a:p>
@@ -4874,7 +4936,7 @@
                 <a:latin typeface="맑은 고딕"/>
                 <a:ea typeface="맑은 고딕"/>
               </a:rPr>
-              <a:t>26. 두 번째 평가 —</a:t>
+              <a:t>28. 잘못된 관행 —</a:t>
             </a:r>
             <a:r>
               <a:rPr sz="1400" b="0">
@@ -4884,7 +4946,7 @@
                 <a:latin typeface="맑은 고딕"/>
                 <a:ea typeface="맑은 고딕"/>
               </a:rPr>
-              <a:t> 주문 항목의 생성</a:t>
+              <a:t> 대안 하나</a:t>
             </a:r>
           </a:p>
           <a:p>
@@ -4905,7 +4967,7 @@
                 <a:latin typeface="맑은 고딕"/>
                 <a:ea typeface="맑은 고딕"/>
               </a:rPr>
-              <a:t>27. 잘못된 관행 —</a:t>
+              <a:t>29. 잘못된 관행 —</a:t>
             </a:r>
             <a:r>
               <a:rPr sz="1400" b="0">
@@ -4915,7 +4977,7 @@
                 <a:latin typeface="맑은 고딕"/>
                 <a:ea typeface="맑은 고딕"/>
               </a:rPr>
-              <a:t> 원칙 점수 매기기</a:t>
+              <a:t> 기록 없는 결정</a:t>
             </a:r>
           </a:p>
           <a:p>
@@ -4936,7 +4998,7 @@
                 <a:latin typeface="맑은 고딕"/>
                 <a:ea typeface="맑은 고딕"/>
               </a:rPr>
-              <a:t>28. 잘못된 관행 —</a:t>
+              <a:t>30. 잘못된 관행 —</a:t>
             </a:r>
             <a:r>
               <a:rPr sz="1400" b="0">
@@ -4946,7 +5008,7 @@
                 <a:latin typeface="맑은 고딕"/>
                 <a:ea typeface="맑은 고딕"/>
               </a:rPr>
-              <a:t> 대안 하나</a:t>
+              <a:t> 미래로 평가하기</a:t>
             </a:r>
           </a:p>
           <a:p>
@@ -4967,17 +5029,7 @@
                 <a:latin typeface="맑은 고딕"/>
                 <a:ea typeface="맑은 고딕"/>
               </a:rPr>
-              <a:t>29. 잘못된 관행 —</a:t>
-            </a:r>
-            <a:r>
-              <a:rPr sz="1400" b="0">
-                <a:solidFill>
-                  <a:srgbClr val="000000"/>
-                </a:solidFill>
-                <a:latin typeface="맑은 고딕"/>
-                <a:ea typeface="맑은 고딕"/>
-              </a:rPr>
-              <a:t> 기록 없는 결정</a:t>
+              <a:t>31. 적정 평가</a:t>
             </a:r>
           </a:p>
           <a:p>
@@ -4998,7 +5050,7 @@
                 <a:latin typeface="맑은 고딕"/>
                 <a:ea typeface="맑은 고딕"/>
               </a:rPr>
-              <a:t>30. 잘못된 관행 —</a:t>
+              <a:t>32. 실습 —</a:t>
             </a:r>
             <a:r>
               <a:rPr sz="1400" b="0">
@@ -5008,7 +5060,69 @@
                 <a:latin typeface="맑은 고딕"/>
                 <a:ea typeface="맑은 고딕"/>
               </a:rPr>
-              <a:t> 미래로 평가하기</a:t>
+              <a:t> 설계 대안 평가</a:t>
+            </a:r>
+          </a:p>
+          <a:p>
+            <a:pPr lvl="1" marL="355600" indent="0">
+              <a:spcBef>
+                <a:spcPts val="300"/>
+              </a:spcBef>
+              <a:spcAft>
+                <a:spcPts val="300"/>
+              </a:spcAft>
+              <a:buNone/>
+            </a:pPr>
+            <a:r>
+              <a:rPr sz="1600" b="0">
+                <a:solidFill>
+                  <a:srgbClr val="000000"/>
+                </a:solidFill>
+                <a:latin typeface="맑은 고딕"/>
+                <a:ea typeface="맑은 고딕"/>
+              </a:rPr>
+              <a:t>33. 대안 비교 </a:t>
+            </a:r>
+            <a:r>
+              <a:rPr sz="1200" b="0">
+                <a:solidFill>
+                  <a:srgbClr val="000000"/>
+                </a:solidFill>
+                <a:latin typeface="맑은 고딕"/>
+                <a:ea typeface="맑은 고딕"/>
+              </a:rPr>
+              <a:t>(안)</a:t>
+            </a:r>
+          </a:p>
+          <a:p>
+            <a:pPr lvl="1" marL="355600" indent="0">
+              <a:spcBef>
+                <a:spcPts val="300"/>
+              </a:spcBef>
+              <a:spcAft>
+                <a:spcPts val="300"/>
+              </a:spcAft>
+              <a:buNone/>
+            </a:pPr>
+            <a:r>
+              <a:rPr sz="1600" b="0">
+                <a:solidFill>
+                  <a:srgbClr val="000000"/>
+                </a:solidFill>
+                <a:latin typeface="맑은 고딕"/>
+                <a:ea typeface="맑은 고딕"/>
+              </a:rPr>
+              <a:t>34. 결정 기록 </a:t>
+            </a:r>
+            <a:r>
+              <a:rPr sz="1200" b="0">
+                <a:solidFill>
+                  <a:srgbClr val="000000"/>
+                </a:solidFill>
+                <a:latin typeface="맑은 고딕"/>
+                <a:ea typeface="맑은 고딕"/>
+              </a:rPr>
+              <a:t>(안)</a:t>
             </a:r>
           </a:p>
         </p:txBody>
@@ -15894,120 +16008,6 @@
             <a:normAutofit/>
           </a:bodyPr>
           <a:lstStyle/>
-          <a:p>
-            <a:pPr lvl="1" marL="355600" indent="0">
-              <a:spcBef>
-                <a:spcPts val="300"/>
-              </a:spcBef>
-              <a:spcAft>
-                <a:spcPts val="300"/>
-              </a:spcAft>
-              <a:buNone/>
-            </a:pPr>
-            <a:r>
-              <a:rPr sz="1600" b="0">
-                <a:solidFill>
-                  <a:srgbClr val="000000"/>
-                </a:solidFill>
-                <a:latin typeface="맑은 고딕"/>
-                <a:ea typeface="맑은 고딕"/>
-              </a:rPr>
-              <a:t>31. 적정 평가</a:t>
-            </a:r>
-          </a:p>
-          <a:p>
-            <a:pPr lvl="1" marL="355600" indent="0">
-              <a:spcBef>
-                <a:spcPts val="300"/>
-              </a:spcBef>
-              <a:spcAft>
-                <a:spcPts val="300"/>
-              </a:spcAft>
-              <a:buNone/>
-            </a:pPr>
-            <a:r>
-              <a:rPr sz="1600" b="0">
-                <a:solidFill>
-                  <a:srgbClr val="000000"/>
-                </a:solidFill>
-                <a:latin typeface="맑은 고딕"/>
-                <a:ea typeface="맑은 고딕"/>
-              </a:rPr>
-              <a:t>32. 실습 —</a:t>
-            </a:r>
-            <a:r>
-              <a:rPr sz="1400" b="0">
-                <a:solidFill>
-                  <a:srgbClr val="000000"/>
-                </a:solidFill>
-                <a:latin typeface="맑은 고딕"/>
-                <a:ea typeface="맑은 고딕"/>
-              </a:rPr>
-              <a:t> 설계 대안 평가</a:t>
-            </a:r>
-          </a:p>
-          <a:p>
-            <a:pPr lvl="1" marL="355600" indent="0">
-              <a:spcBef>
-                <a:spcPts val="300"/>
-              </a:spcBef>
-              <a:spcAft>
-                <a:spcPts val="300"/>
-              </a:spcAft>
-              <a:buNone/>
-            </a:pPr>
-            <a:r>
-              <a:rPr sz="1600" b="0">
-                <a:solidFill>
-                  <a:srgbClr val="000000"/>
-                </a:solidFill>
-                <a:latin typeface="맑은 고딕"/>
-                <a:ea typeface="맑은 고딕"/>
-              </a:rPr>
-              <a:t>33. 대안 비교 </a:t>
-            </a:r>
-            <a:r>
-              <a:rPr sz="1200" b="0">
-                <a:solidFill>
-                  <a:srgbClr val="000000"/>
-                </a:solidFill>
-                <a:latin typeface="맑은 고딕"/>
-                <a:ea typeface="맑은 고딕"/>
-              </a:rPr>
-              <a:t>(안)</a:t>
-            </a:r>
-          </a:p>
-          <a:p>
-            <a:pPr lvl="1" marL="355600" indent="0">
-              <a:spcBef>
-                <a:spcPts val="300"/>
-              </a:spcBef>
-              <a:spcAft>
-                <a:spcPts val="300"/>
-              </a:spcAft>
-              <a:buNone/>
-            </a:pPr>
-            <a:r>
-              <a:rPr sz="1600" b="0">
-                <a:solidFill>
-                  <a:srgbClr val="000000"/>
-                </a:solidFill>
-                <a:latin typeface="맑은 고딕"/>
-                <a:ea typeface="맑은 고딕"/>
-              </a:rPr>
-              <a:t>34. 결정 기록 </a:t>
-            </a:r>
-            <a:r>
-              <a:rPr sz="1200" b="0">
-                <a:solidFill>
-                  <a:srgbClr val="000000"/>
-                </a:solidFill>
-                <a:latin typeface="맑은 고딕"/>
-                <a:ea typeface="맑은 고딕"/>
-              </a:rPr>
-              <a:t>(안)</a:t>
-            </a:r>
-          </a:p>
           <a:p>
             <a:pPr lvl="1" marL="355600" indent="0">
               <a:spcBef>
@@ -28356,7 +28356,7 @@
         <p:spPr>
           <a:xfrm>
             <a:off x="365760" y="960120"/>
-            <a:ext cx="8622792" cy="5522976"/>
+            <a:ext cx="8622792" cy="5352345"/>
           </a:xfrm>
         </p:spPr>
         <p:txBody>
@@ -31045,7 +31045,7 @@
         <p:spPr>
           <a:xfrm>
             <a:off x="233172" y="1414318"/>
-            <a:ext cx="4338828" cy="5068778"/>
+            <a:ext cx="4338828" cy="4898147"/>
           </a:xfrm>
         </p:spPr>
         <p:txBody>
@@ -31602,7 +31602,7 @@
         <p:spPr>
           <a:xfrm>
             <a:off x="4572000" y="1414318"/>
-            <a:ext cx="4439412" cy="5068778"/>
+            <a:ext cx="4439412" cy="4898147"/>
           </a:xfrm>
         </p:spPr>
         <p:txBody>
@@ -32099,7 +32099,7 @@
         <p:spPr>
           <a:xfrm>
             <a:off x="233172" y="1414318"/>
-            <a:ext cx="4338828" cy="5068778"/>
+            <a:ext cx="4338828" cy="4898147"/>
           </a:xfrm>
         </p:spPr>
         <p:txBody>
@@ -32370,7 +32370,7 @@
         <p:spPr>
           <a:xfrm>
             <a:off x="4572000" y="1414318"/>
-            <a:ext cx="4439412" cy="5068778"/>
+            <a:ext cx="4439412" cy="4898147"/>
           </a:xfrm>
         </p:spPr>
         <p:txBody>

--- a/courses/ooad/sessions/s09.pptx
+++ b/courses/ooad/sessions/s09.pptx
@@ -635,7 +635,7 @@
             <a:pPr lvl="0"/>
             <a:r>
               <a:rPr lang="ko-KR" sz="1200"/>
-              <a:t>실제/추측의 구분은 "08. 변화 대응과 변이 설계"의 변이 지점과 진화 지점이다. 권역 규칙은 이미 한 번 바뀐 교육용 가정이다.</a:t>
+              <a:t>실제/추측의 구분은 "세션 08. 변화 대응과 변이 설계"의 변이 지점과 진화 지점이다. 권역 규칙은 이미 한 번 바뀐 교육용 가정이다.</a:t>
             </a:r>
           </a:p>
           <a:p>
@@ -846,7 +846,7 @@
             <a:pPr lvl="0"/>
             <a:r>
               <a:rPr lang="ko-KR" sz="1200"/>
-              <a:t>의존 방향의 원칙은 "05. 구조적 경계와 의존성"의 SDP, "07. 책임·협력·계약"의 DIP와 같다.</a:t>
+              <a:t>의존 방향의 원칙은 "세션 05. 구조적 경계와 의존성"의 SDP, "세션 07. 책임·협력·계약"의 DIP와 같다.</a:t>
             </a:r>
           </a:p>
         </p:txBody>
@@ -982,7 +982,7 @@
             <a:pPr lvl="0"/>
             <a:r>
               <a:rPr lang="ko-KR" sz="1200"/>
-              <a:t>SOLID는 "07. 책임·협력·계약"·"08. 변화 대응과 변이 설계"에서, GRASP는 두 세션의 목록 슬라이드에서 다뤘다.</a:t>
+              <a:t>SOLID는 "세션 07. 책임·협력·계약"·"세션 08. 변화 대응과 변이 설계"에서, GRASP는 두 세션의 목록 슬라이드에서 다뤘다.</a:t>
             </a:r>
           </a:p>
         </p:txBody>
@@ -1118,7 +1118,7 @@
             <a:pPr lvl="0"/>
             <a:r>
               <a:rPr lang="ko-KR" sz="1200"/>
-              <a:t>품질 특성의 분류는 "02. 요구 분석과 유스케이스"의 ISO/IEC 25010을 참조한다. 모든 특성을 평가하지 않고 이 문제에 걸린 특성만 본다.</a:t>
+              <a:t>품질 특성의 분류는 "세션 02. 요구 분석과 유스케이스"의 ISO/IEC 25010을 참조한다. 모든 특성을 평가하지 않고 이 문제에 걸린 특성만 본다.</a:t>
             </a:r>
           </a:p>
           <a:p>
@@ -1254,7 +1254,7 @@
             <a:pPr lvl="0"/>
             <a:r>
               <a:rPr lang="ko-KR" sz="1200"/>
-              <a:t>입력은 "08. 변화 대응과 변이 설계"의 변경 요청과 설계다. 이 세션은 그 세션이 열어 둔 질문(배송마다 어느 대행사를 쓸지 누가 정하는가?)을 평가 대상으로 삼는다.</a:t>
+              <a:t>입력은 "세션 08. 변화 대응과 변이 설계"의 변경 요청과 설계다. 이 세션은 그 세션이 열어 둔 질문(배송마다 어느 대행사를 쓸지 누가 정하는가?)을 평가 대상으로 삼는다.</a:t>
             </a:r>
           </a:p>
         </p:txBody>
@@ -1465,7 +1465,7 @@
             <a:pPr lvl="0"/>
             <a:r>
               <a:rPr lang="ko-KR" sz="1200"/>
-              <a:t>결정 기록은 코드 저장소에 코드와 함께 둔다. 아키텍처 수준의 결정은 "13. OOAD에서 전문영역으로 — Architecture · DDD · MSA"로 이어진다.</a:t>
+              <a:t>결정 기록은 코드 저장소에 코드와 함께 둔다. 아키텍처 수준의 결정은 "세션 13. OOAD에서 전문영역으로 — Architecture · DDD · MSA"로 이어진다.</a:t>
             </a:r>
           </a:p>
         </p:txBody>
@@ -1669,7 +1669,7 @@
             <a:pPr lvl="0"/>
             <a:r>
               <a:rPr lang="ko-KR" sz="1200"/>
-              <a:t>선택기는 배송지를 문자열로 받는다. delivery가 order의 Address를 알면 패키지 순환이 생기기 때문이다("05. 구조적 경계와 의존성"의 순환 없음). 이것도 이 설계의 작은 절충이다.</a:t>
+              <a:t>선택기는 배송지를 문자열로 받는다. delivery가 order의 Address를 알면 패키지 순환이 생기기 때문이다("세션 05. 구조적 경계와 의존성"의 순환 없음). 이것도 이 설계의 작은 절충이다.</a:t>
             </a:r>
           </a:p>
         </p:txBody>
@@ -1798,7 +1798,7 @@
             <a:pPr lvl="0"/>
             <a:r>
               <a:rPr lang="ko-KR" sz="1200"/>
-              <a:t>"07. 책임·협력·계약"의 「07. GRASP」 노트가 남긴 연습 거리다. 생성자 원칙의 조건(포함·초기 정보)이 두 대안을 모두 지지한다 — 이럴 때 결정을 가르는 것은 결합(주문이 상품을 아는가)이다.</a:t>
+              <a:t>"세션 07. 책임·협력·계약"의 「07. GRASP」 노트가 남긴 연습 거리다. 생성자 원칙의 조건(포함·초기 정보)이 두 대안을 모두 지지한다 — 이럴 때 결정을 가르는 것은 결합(주문이 상품을 아는가)이다.</a:t>
             </a:r>
           </a:p>
           <a:p>
@@ -2070,7 +2070,7 @@
             <a:pPr lvl="0"/>
             <a:r>
               <a:rPr lang="ko-KR" sz="1200"/>
-              <a:t>결정 기록은 LLM에 맥락으로 주기 좋은 문서다. 설계 의도를 코드만으로 추측하게 하지 않는다 — "14. AI-native SW공학".</a:t>
+              <a:t>결정 기록은 LLM에 맥락으로 주기 좋은 문서다. 설계 의도를 코드만으로 추측하게 하지 않는다 — "세션 14. AI-native SW공학".</a:t>
             </a:r>
           </a:p>
         </p:txBody>
@@ -2138,7 +2138,7 @@
             <a:pPr lvl="0"/>
             <a:r>
               <a:rPr lang="ko-KR" sz="1200"/>
-              <a:t>"08. 변화 대응과 변이 설계"의 추측성 일반화를 평가 단계에서 막는 방법이다.</a:t>
+              <a:t>"세션 08. 변화 대응과 변이 설계"의 추측성 일반화를 평가 단계에서 막는 방법이다.</a:t>
             </a:r>
           </a:p>
         </p:txBody>
@@ -2199,14 +2199,14 @@
             <a:pPr lvl="0"/>
             <a:r>
               <a:rPr lang="ko-KR" sz="1200"/>
-              <a:t>되돌리기 어려운 결정만 무겁게 다룬다는 판단은 "05. 구조적 경계와 의존성"의 「03. 구조적 경계」와 같다.</a:t>
+              <a:t>되돌리기 어려운 결정만 무겁게 다룬다는 판단은 "세션 05. 구조적 경계와 의존성"의 「03. 구조적 경계」와 같다.</a:t>
             </a:r>
           </a:p>
           <a:p>
             <a:pPr lvl="0"/>
             <a:r>
               <a:rPr lang="ko-KR" sz="1200"/>
-              <a:t>여러 시스템에 걸친 결정의 평가(품질 속성 시나리오 등)는 "13. OOAD에서 전문영역으로 — Architecture · DDD · MSA"에서 다룬다.</a:t>
+              <a:t>여러 시스템에 걸친 결정의 평가(품질 속성 시나리오 등)는 "세션 13. OOAD에서 전문영역으로 — Architecture · DDD · MSA"에서 다룬다.</a:t>
             </a:r>
           </a:p>
         </p:txBody>
@@ -2403,7 +2403,7 @@
             <a:pPr lvl="0"/>
             <a:r>
               <a:rPr lang="ko-KR" sz="1200"/>
-              <a:t>A는 주기 계산을 switch로 여러 곳(회차 생성, 다음 배송일 표시)에서 반복하게 된다 — "08. 변화 대응과 변이 설계"의 타입 검사 분기.</a:t>
+              <a:t>A는 주기 계산을 switch로 여러 곳(회차 생성, 다음 배송일 표시)에서 반복하게 된다 — "세션 08. 변화 대응과 변이 설계"의 타입 검사 분기.</a:t>
             </a:r>
           </a:p>
         </p:txBody>
@@ -2797,7 +2797,7 @@
             <a:pPr lvl="0"/>
             <a:r>
               <a:rPr lang="ko-KR" sz="1200"/>
-              <a:t>"08. 변화 대응과 변이 설계"의 「08. 당일 배송의 파급」은 "배송마다 대행사를 고르는 조립 책임"을 열어 둔 채 테스트에서 조립했다. 이 세션이 그 결정을 내린다.</a:t>
+              <a:t>"세션 08. 변화 대응과 변이 설계"의 「08. 당일 배송의 파급」은 "배송마다 대행사를 고르는 조립 책임"을 열어 둔 채 테스트에서 조립했다. 이 세션이 그 결정을 내린다.</a:t>
             </a:r>
           </a:p>
           <a:p>
@@ -2872,7 +2872,7 @@
             <a:pPr lvl="0"/>
             <a:r>
               <a:rPr lang="ko-KR" sz="1200"/>
-              <a:t>이 대안은 "05. 구조적 경계와 의존성"의 구조적 제약(업무 경계는 연동을 모른다)을 어긴다. 그래도 비교의 기준점으로 둔다.</a:t>
+              <a:t>이 대안은 "세션 05. 구조적 경계와 의존성"의 구조적 제약(업무 경계는 연동을 모른다)을 어긴다. 그래도 비교의 기준점으로 둔다.</a:t>
             </a:r>
           </a:p>
         </p:txBody>
@@ -2933,7 +2933,7 @@
             <a:pPr lvl="0"/>
             <a:r>
               <a:rPr lang="ko-KR" sz="1200"/>
-              <a:t>선택기는 GRASP의 순수 가공(도메인 개념이 아닌 가공 클래스)이자 생성자(Delivery의 초기화 정보를 가진 쪽)다("07. 책임·협력·계약"의 「07. GRASP」, "08. 변화 대응과 변이 설계"의 「12. GRASP 변화 대응」).</a:t>
+              <a:t>선택기는 GRASP의 순수 가공(도메인 개념이 아닌 가공 클래스)이자 생성자(Delivery의 초기화 정보를 가진 쪽)다("세션 07. 책임·협력·계약"의 「07. GRASP」, "세션 08. 변화 대응과 변이 설계"의 「12. GRASP 변화 대응」).</a:t>
             </a:r>
           </a:p>
           <a:p>
@@ -5492,7 +5492,7 @@
         </p:blipFill>
         <p:spPr>
           <a:xfrm>
-            <a:off x="1802423" y="3407058"/>
+            <a:off x="1802423" y="2788920"/>
             <a:ext cx="5539154" cy="2635250"/>
           </a:xfrm>
           <a:prstGeom prst="rect">
@@ -5669,7 +5669,7 @@
           </p:nvPr>
         </p:nvGraphicFramePr>
         <p:xfrm>
-          <a:off x="1357186" y="1842998"/>
+          <a:off x="1357186" y="1813560"/>
           <a:ext cx="6416040" cy="3873500"/>
         </p:xfrm>
         <a:graphic>
@@ -7025,7 +7025,7 @@
         </p:nvSpPr>
         <p:spPr>
           <a:xfrm>
-            <a:off x="365760" y="3384598"/>
+            <a:off x="365760" y="3482160"/>
             <a:ext cx="8412480" cy="781278"/>
           </a:xfrm>
           <a:prstGeom prst="rect">
@@ -7272,7 +7272,7 @@
           </p:nvPr>
         </p:nvGraphicFramePr>
         <p:xfrm>
-          <a:off x="2111566" y="2649162"/>
+          <a:off x="2111566" y="2600498"/>
           <a:ext cx="4907280" cy="3873500"/>
         </p:xfrm>
         <a:graphic>
@@ -8403,7 +8403,7 @@
           </p:nvPr>
         </p:nvGraphicFramePr>
         <p:xfrm>
-          <a:off x="1999806" y="2801048"/>
+          <a:off x="1999806" y="2600498"/>
           <a:ext cx="5130800" cy="3873500"/>
         </p:xfrm>
         <a:graphic>
@@ -9142,7 +9142,7 @@
         <p:spPr>
           <a:xfrm>
             <a:off x="365760" y="960120"/>
-            <a:ext cx="8412480" cy="1739328"/>
+            <a:ext cx="8412480" cy="1587442"/>
           </a:xfrm>
           <a:prstGeom prst="rect">
             <a:avLst/>
@@ -9514,7 +9514,7 @@
           </p:nvPr>
         </p:nvGraphicFramePr>
         <p:xfrm>
-          <a:off x="1301306" y="2801048"/>
+          <a:off x="1301306" y="2762596"/>
           <a:ext cx="6527800" cy="3873500"/>
         </p:xfrm>
         <a:graphic>
@@ -10645,7 +10645,7 @@
           </p:nvPr>
         </p:nvGraphicFramePr>
         <p:xfrm>
-          <a:off x="1510856" y="2801048"/>
+          <a:off x="1510856" y="2762596"/>
           <a:ext cx="6108700" cy="3873500"/>
         </p:xfrm>
         <a:graphic>
@@ -11776,7 +11776,7 @@
           </p:nvPr>
         </p:nvGraphicFramePr>
         <p:xfrm>
-          <a:off x="1413066" y="1842998"/>
+          <a:off x="1413066" y="1813560"/>
           <a:ext cx="6304280" cy="3873500"/>
         </p:xfrm>
         <a:graphic>
@@ -13336,7 +13336,7 @@
         </p:nvSpPr>
         <p:spPr>
           <a:xfrm>
-            <a:off x="365760" y="3672598"/>
+            <a:off x="365760" y="3770160"/>
             <a:ext cx="8412480" cy="781278"/>
           </a:xfrm>
           <a:prstGeom prst="rect">
@@ -14017,7 +14017,7 @@
           </p:nvPr>
         </p:nvGraphicFramePr>
         <p:xfrm>
-          <a:off x="868236" y="1842998"/>
+          <a:off x="868236" y="1813560"/>
           <a:ext cx="7393940" cy="3873500"/>
         </p:xfrm>
         <a:graphic>
@@ -15548,7 +15548,7 @@
           </p:nvPr>
         </p:nvGraphicFramePr>
         <p:xfrm>
-          <a:off x="2224596" y="1842998"/>
+          <a:off x="2224596" y="1813560"/>
           <a:ext cx="4681220" cy="3873500"/>
         </p:xfrm>
         <a:graphic>
@@ -17352,7 +17352,7 @@
         </p:nvSpPr>
         <p:spPr>
           <a:xfrm>
-            <a:off x="365760" y="3960598"/>
+            <a:off x="365760" y="4058160"/>
             <a:ext cx="8412480" cy="781278"/>
           </a:xfrm>
           <a:prstGeom prst="rect">
@@ -18665,7 +18665,7 @@
           </p:nvPr>
         </p:nvGraphicFramePr>
         <p:xfrm>
-          <a:off x="412306" y="3209971"/>
+          <a:off x="412306" y="3036916"/>
           <a:ext cx="8305800" cy="3873500"/>
         </p:xfrm>
         <a:graphic>
@@ -19236,7 +19236,7 @@
         <p:spPr>
           <a:xfrm>
             <a:off x="365760" y="960120"/>
-            <a:ext cx="8412480" cy="2148251"/>
+            <a:ext cx="8412480" cy="1996365"/>
           </a:xfrm>
           <a:prstGeom prst="rect">
             <a:avLst/>
@@ -19608,7 +19608,7 @@
           </p:nvPr>
         </p:nvGraphicFramePr>
         <p:xfrm>
-          <a:off x="2571306" y="2952933"/>
+          <a:off x="2571306" y="3535680"/>
           <a:ext cx="3987800" cy="3873500"/>
         </p:xfrm>
         <a:graphic>
@@ -20332,7 +20332,7 @@
         <p:spPr>
           <a:xfrm>
             <a:off x="365760" y="960120"/>
-            <a:ext cx="8412480" cy="1891213"/>
+            <a:ext cx="8412480" cy="2463707"/>
           </a:xfrm>
           <a:prstGeom prst="rect">
             <a:avLst/>
@@ -21338,7 +21338,7 @@
         </p:blipFill>
         <p:spPr>
           <a:xfrm>
-            <a:off x="646235" y="3305824"/>
+            <a:off x="646235" y="1813560"/>
             <a:ext cx="7851531" cy="1580417"/>
           </a:xfrm>
           <a:prstGeom prst="rect">
@@ -22447,7 +22447,7 @@
           </p:nvPr>
         </p:nvGraphicFramePr>
         <p:xfrm>
-          <a:off x="1006666" y="1842998"/>
+          <a:off x="1006666" y="1813560"/>
           <a:ext cx="7117080" cy="3873500"/>
         </p:xfrm>
         <a:graphic>
@@ -23663,7 +23663,7 @@
           </p:nvPr>
         </p:nvGraphicFramePr>
         <p:xfrm>
-          <a:off x="1648016" y="1842998"/>
+          <a:off x="1648016" y="1813560"/>
           <a:ext cx="5834380" cy="3873500"/>
         </p:xfrm>
         <a:graphic>
@@ -24909,7 +24909,7 @@
           </p:nvPr>
         </p:nvGraphicFramePr>
         <p:xfrm>
-          <a:off x="1899476" y="1842998"/>
+          <a:off x="1899476" y="1813560"/>
           <a:ext cx="5331460" cy="3873500"/>
         </p:xfrm>
         <a:graphic>
@@ -25738,7 +25738,7 @@
           </p:nvPr>
         </p:nvGraphicFramePr>
         <p:xfrm>
-          <a:off x="1703896" y="1842998"/>
+          <a:off x="1703896" y="1813560"/>
           <a:ext cx="5722620" cy="3873500"/>
         </p:xfrm>
         <a:graphic>
@@ -26527,7 +26527,7 @@
           </p:nvPr>
         </p:nvGraphicFramePr>
         <p:xfrm>
-          <a:off x="2136966" y="1842998"/>
+          <a:off x="2136966" y="1813560"/>
           <a:ext cx="4856480" cy="3873500"/>
         </p:xfrm>
         <a:graphic>
@@ -27316,7 +27316,7 @@
           </p:nvPr>
         </p:nvGraphicFramePr>
         <p:xfrm>
-          <a:off x="1355916" y="1842998"/>
+          <a:off x="1355916" y="1813560"/>
           <a:ext cx="6418580" cy="3873500"/>
         </p:xfrm>
         <a:graphic>
@@ -29114,7 +29114,7 @@
                 <a:latin typeface="맑은 고딕"/>
                 <a:ea typeface="맑은 고딕"/>
               </a:rPr>
-              <a:t>("10. 기술 제약과 도메인 의미 보존")</a:t>
+              <a:t>("세션 10. 기술 제약과 도메인 의미 보존")</a:t>
             </a:r>
             <a:r>
               <a:rPr sz="1400" b="0">
@@ -29941,7 +29941,7 @@
           </p:nvPr>
         </p:nvGraphicFramePr>
         <p:xfrm>
-          <a:off x="756476" y="1842998"/>
+          <a:off x="756476" y="1813560"/>
           <a:ext cx="7617460" cy="3873500"/>
         </p:xfrm>
         <a:graphic>
@@ -34914,7 +34914,7 @@
                 <a:latin typeface="맑은 고딕"/>
                 <a:ea typeface="맑은 고딕"/>
               </a:rPr>
-              <a:t>"08. 변화 대응과 변이 설계"에서 배송 대행사가 둘이 되었다. 이제 </a:t>
+              <a:t>"세션 08. 변화 대응과 변이 설계"에서 배송 대행사가 둘이 되었다. 이제 </a:t>
             </a:r>
             <a:r>
               <a:rPr sz="1800" b="1">
@@ -35545,7 +35545,7 @@
         </p:blipFill>
         <p:spPr>
           <a:xfrm>
-            <a:off x="2492375" y="3628086"/>
+            <a:off x="2492375" y="2788920"/>
             <a:ext cx="4159250" cy="2193192"/>
           </a:xfrm>
           <a:prstGeom prst="rect">
@@ -35980,7 +35980,7 @@
         </p:blipFill>
         <p:spPr>
           <a:xfrm>
-            <a:off x="646235" y="3337891"/>
+            <a:off x="646235" y="2514600"/>
             <a:ext cx="7851531" cy="2466242"/>
           </a:xfrm>
           <a:prstGeom prst="rect">
